--- a/checkupp_investment_support_production_pilot.pptx
+++ b/checkupp_investment_support_production_pilot.pptx
@@ -2579,23 +2579,7 @@
                   <a:srgbClr val="0B172A"/>
                 </a:solidFill>
               </a:rPr>
-              <a:t>$</a:t>
-            </a:r>
-            <a:r>
-              <a:rPr lang="en-US" sz="1200" b="1" dirty="0" smtClean="0">
-                <a:solidFill>
-                  <a:srgbClr val="0B172A"/>
-                </a:solidFill>
-              </a:rPr>
-              <a:t>35</a:t>
-            </a:r>
-            <a:r>
-              <a:rPr lang="en-US" sz="1200" b="1" dirty="0" smtClean="0">
-                <a:solidFill>
-                  <a:srgbClr val="0B172A"/>
-                </a:solidFill>
-              </a:rPr>
-              <a:t>K</a:t>
+              <a:t>$35K</a:t>
             </a:r>
             <a:endParaRPr lang="en-US" sz="1200" dirty="0"/>
           </a:p>
@@ -2641,15 +2625,7 @@
                   <a:srgbClr val="5B6778"/>
                 </a:solidFill>
               </a:rPr>
-              <a:t>Software p</a:t>
-            </a:r>
-            <a:r>
-              <a:rPr lang="en-US" sz="990" dirty="0" smtClean="0">
-                <a:solidFill>
-                  <a:srgbClr val="5B6778"/>
-                </a:solidFill>
-              </a:rPr>
-              <a:t>roduct development, UX, </a:t>
+              <a:t>Software product development, UX, </a:t>
             </a:r>
             <a:r>
               <a:rPr lang="en-US" sz="990" dirty="0">
@@ -3315,11 +3291,6 @@
               </a:rPr>
               <a:t>Founders</a:t>
             </a:r>
-            <a:endParaRPr lang="en-US" sz="940" dirty="0">
-              <a:solidFill>
-                <a:srgbClr val="5B6778"/>
-              </a:solidFill>
-            </a:endParaRPr>
           </a:p>
         </p:txBody>
       </p:sp>
@@ -3505,11 +3476,6 @@
               </a:rPr>
               <a:t>Founders</a:t>
             </a:r>
-            <a:endParaRPr lang="en-US" sz="940" dirty="0">
-              <a:solidFill>
-                <a:srgbClr val="5B6778"/>
-              </a:solidFill>
-            </a:endParaRPr>
           </a:p>
         </p:txBody>
       </p:sp>
@@ -3679,11 +3645,6 @@
               </a:rPr>
               <a:t>Founders</a:t>
             </a:r>
-            <a:endParaRPr lang="en-US" sz="940" dirty="0">
-              <a:solidFill>
-                <a:srgbClr val="5B6778"/>
-              </a:solidFill>
-            </a:endParaRPr>
           </a:p>
         </p:txBody>
       </p:sp>
